--- a/courses/build/mentor-3day/M-ON.zu.pptx
+++ b/courses/build/mentor-3day/M-ON.zu.pptx
@@ -676,7 +676,7 @@
           </a:p>
           <a:p>
             <a:r>
-              <a:t>Clip M-ANI-05: public/course-animations/market-community/watch-04-farm-record.mp4</a:t>
+              <a:t>Clip M-ANI-05: public/course-media/mentor-3day/M-ANI-05.mp4</a:t>
             </a:r>
           </a:p>
         </p:txBody>
@@ -5394,49 +5394,27 @@
           </a:p>
         </p:txBody>
       </p:sp>
-      <p:pic>
-        <p:nvPicPr>
-          <p:cNvPr id="7" name="Picture 6" descr="watch-04-farm-record.jpg"/>
-          <p:cNvPicPr>
-            <a:picLocks noChangeAspect="1"/>
-          </p:cNvPicPr>
-          <p:nvPr/>
-        </p:nvPicPr>
-        <p:blipFill>
-          <a:blip r:embed="rId2"/>
-          <a:stretch>
-            <a:fillRect/>
-          </a:stretch>
-        </p:blipFill>
-        <p:spPr>
-          <a:xfrm>
-            <a:off x="5852160" y="2308860"/>
-            <a:ext cx="5852160" cy="3291840"/>
-          </a:xfrm>
-          <a:prstGeom prst="rect">
-            <a:avLst/>
-          </a:prstGeom>
-        </p:spPr>
-      </p:pic>
-      <p:sp>
-        <p:nvSpPr>
-          <p:cNvPr id="8" name="Rectangle 7"/>
+      <p:sp>
+        <p:nvSpPr>
+          <p:cNvPr id="7" name="Rectangle 6"/>
           <p:cNvSpPr/>
           <p:nvPr/>
         </p:nvSpPr>
         <p:spPr>
           <a:xfrm>
-            <a:off x="5852160" y="5806440"/>
-            <a:ext cx="5852160" cy="411480"/>
+            <a:off x="5852160" y="1691640"/>
+            <a:ext cx="5852160" cy="4526280"/>
           </a:xfrm>
           <a:prstGeom prst="rect">
             <a:avLst/>
           </a:prstGeom>
           <a:solidFill>
-            <a:srgbClr val="232323"/>
+            <a:srgbClr val="FAF7F0"/>
           </a:solidFill>
-          <a:ln>
-            <a:noFill/>
+          <a:ln w="15875">
+            <a:solidFill>
+              <a:srgbClr val="6E9CC4"/>
+            </a:solidFill>
           </a:ln>
           <a:effectLst/>
         </p:spPr>
@@ -5464,14 +5442,14 @@
       </p:sp>
       <p:sp>
         <p:nvSpPr>
-          <p:cNvPr id="9" name="TextBox 8"/>
+          <p:cNvPr id="8" name="TextBox 7"/>
           <p:cNvSpPr txBox="1"/>
           <p:nvPr/>
         </p:nvSpPr>
         <p:spPr>
           <a:xfrm>
-            <a:off x="5943600" y="5815584"/>
-            <a:ext cx="5669280" cy="384048"/>
+            <a:off x="6080760" y="1874520"/>
+            <a:ext cx="5394960" cy="365760"/>
           </a:xfrm>
           <a:prstGeom prst="rect">
             <a:avLst/>
@@ -5479,7 +5457,7 @@
           <a:noFill/>
         </p:spPr>
         <p:txBody>
-          <a:bodyPr wrap="square" anchor="ctr" lIns="45720" rIns="45720">
+          <a:bodyPr wrap="square" anchor="t" lIns="45720" rIns="45720">
             <a:spAutoFit/>
           </a:bodyPr>
           <a:lstStyle/>
@@ -5490,13 +5468,91 @@
               </a:spcAft>
             </a:pPr>
             <a:r>
-              <a:rPr sz="1100" b="0">
-                <a:solidFill>
-                  <a:srgbClr val="FAF7F0"/>
+              <a:rPr sz="1200" b="1">
+                <a:solidFill>
+                  <a:srgbClr val="D9622B"/>
                 </a:solidFill>
                 <a:latin typeface="Calibri"/>
               </a:rPr>
-              <a:t>▶  Clip M-ANI-05 · play from the tablet: watch-04-farm-record.mp4</a:t>
+              <a:t>ANIMATION · M-ANI-05 · coming</a:t>
+            </a:r>
+          </a:p>
+        </p:txBody>
+      </p:sp>
+      <p:sp>
+        <p:nvSpPr>
+          <p:cNvPr id="9" name="TextBox 8"/>
+          <p:cNvSpPr txBox="1"/>
+          <p:nvPr/>
+        </p:nvSpPr>
+        <p:spPr>
+          <a:xfrm>
+            <a:off x="6080760" y="2258568"/>
+            <a:ext cx="5394960" cy="457200"/>
+          </a:xfrm>
+          <a:prstGeom prst="rect">
+            <a:avLst/>
+          </a:prstGeom>
+          <a:noFill/>
+        </p:spPr>
+        <p:txBody>
+          <a:bodyPr wrap="square" anchor="t" lIns="45720" rIns="45720">
+            <a:spAutoFit/>
+          </a:bodyPr>
+          <a:lstStyle/>
+          <a:p>
+            <a:pPr algn="l">
+              <a:spcAft>
+                <a:spcPts val="800"/>
+              </a:spcAft>
+            </a:pPr>
+            <a:r>
+              <a:rPr sz="1800" b="1">
+                <a:solidFill>
+                  <a:srgbClr val="232323"/>
+                </a:solidFill>
+                <a:latin typeface="Georgia"/>
+              </a:rPr>
+              <a:t>Keeping a farm record</a:t>
+            </a:r>
+          </a:p>
+        </p:txBody>
+      </p:sp>
+      <p:sp>
+        <p:nvSpPr>
+          <p:cNvPr id="10" name="TextBox 9"/>
+          <p:cNvSpPr txBox="1"/>
+          <p:nvPr/>
+        </p:nvSpPr>
+        <p:spPr>
+          <a:xfrm>
+            <a:off x="6080760" y="2788920"/>
+            <a:ext cx="5394960" cy="3246120"/>
+          </a:xfrm>
+          <a:prstGeom prst="rect">
+            <a:avLst/>
+          </a:prstGeom>
+          <a:noFill/>
+        </p:spPr>
+        <p:txBody>
+          <a:bodyPr wrap="square" anchor="t" lIns="45720" rIns="45720">
+            <a:spAutoFit/>
+          </a:bodyPr>
+          <a:lstStyle/>
+          <a:p>
+            <a:pPr algn="l">
+              <a:spcAft>
+                <a:spcPts val="800"/>
+              </a:spcAft>
+            </a:pPr>
+            <a:r>
+              <a:rPr sz="1100" b="0">
+                <a:solidFill>
+                  <a:srgbClr val="232323"/>
+                </a:solidFill>
+                <a:latin typeface="Calibri"/>
+              </a:rPr>
+              <a:t>A hand makes tally marks in two columns of a simple exercise book beside a basket of harvested greens and a hanging scale; bunches move from the basket into three piles (eat, share, sell) as marks appear. Marks are simple strokes, never readable writing. (Replaces the withdrawn clip `market-community/watch-04-farm-record.mp4`.)</a:t>
             </a:r>
           </a:p>
         </p:txBody>
